--- a/results/DeepTCR_Project_Update_Presentation_2026-01-05.pptx
+++ b/results/DeepTCR_Project_Update_Presentation_2026-01-05.pptx
@@ -3214,7 +3214,7 @@
               </a:defRPr>
             </a:pPr>
             <a:r>
-              <a:t>Basal Cell Carcinoma (BCC) • 100-fold Monte Carlo CV</a:t>
+              <a:t>Relapsed/Refractory B-cell lymphoma • 100-fold Monte Carlo CV</a:t>
             </a:r>
             <a:br/>
             <a:r>
